--- a/Final_Revision/Exam_Practice/FR-L06_Writing_Workshop_Final_Mock_Exam.pptx
+++ b/Final_Revision/Exam_Practice/FR-L06_Writing_Workshop_Final_Mock_Exam.pptx
@@ -784,7 +784,11 @@
           <a:lstStyle/>
           <a:p>
             <a:r>
-              <a:rPr lang="en-US" dirty="0"/>
+              <a:rPr lang="ar-SA" dirty="0">
+                <a:latin typeface="Amiri" pitchFamily="2" charset="-78"/>
+                <a:ea typeface="Amiri" pitchFamily="2" charset="-78"/>
+                <a:cs typeface="Amiri" pitchFamily="2" charset="-78"/>
+              </a:rPr>
               <a:t>Q3 (3 min to choose and read). Title (أ) suits Core and Develop; title (ب) suits Stretch.</a:t>
             </a:r>
             <a:endParaRPr lang="en-US" dirty="0"/>
@@ -1403,7 +1407,11 @@
           <a:lstStyle/>
           <a:p>
             <a:r>
-              <a:rPr lang="en-US" dirty="0"/>
+              <a:rPr lang="ar-SA" dirty="0">
+                <a:latin typeface="Amiri" pitchFamily="2" charset="-78"/>
+                <a:ea typeface="Amiri" pitchFamily="2" charset="-78"/>
+                <a:cs typeface="Amiri" pitchFamily="2" charset="-78"/>
+              </a:rPr>
               <a:t>WELCOME (1 min) — while students join.
 • Greet each student by name as they arrive: السَّلَامُ عَلَيْكُمْ. Take the register (Pastoral Tracker: attendance 0/1).
 • 2-MINUTE CHECK-IN (SEND training): a private chat to any student who seemed unsettled last lesson — “Are you okay today? 👍 / 👎”.
@@ -1936,7 +1944,11 @@
           <a:lstStyle/>
           <a:p>
             <a:r>
-              <a:rPr lang="en-US" dirty="0"/>
+              <a:rPr lang="ar-SA" dirty="0">
+                <a:latin typeface="Amiri" pitchFamily="2" charset="-78"/>
+                <a:ea typeface="Amiri" pitchFamily="2" charset="-78"/>
+                <a:cs typeface="Amiri" pitchFamily="2" charset="-78"/>
+              </a:rPr>
               <a:t>Question words: أَيْنَ / مَعَ مَنْ (where / with whom — PAST) · لَبِسْتِ / أَكَلْتُمْ (PAST: what you wore and ate) · لِمَاذَا (reason → li-anna) · خِطَطُكِ (FUTURE).</a:t>
             </a:r>
             <a:endParaRPr lang="en-US" dirty="0"/>
@@ -2508,6 +2520,7 @@
                   <a:srgbClr val="D4AF37"/>
                 </a:solidFill>
                 <a:latin typeface="Amiri" pitchFamily="2" charset="-78"/>
+                <a:ea typeface="Amiri" pitchFamily="2" charset="-78"/>
                 <a:cs typeface="Amiri" pitchFamily="2" charset="-78"/>
               </a:rPr>
               <a:t>م</a:t>
@@ -2714,6 +2727,7 @@
                   <a:srgbClr val="D4AF37"/>
                 </a:solidFill>
                 <a:latin typeface="Amiri" pitchFamily="2" charset="-78"/>
+                <a:ea typeface="Amiri" pitchFamily="2" charset="-78"/>
                 <a:cs typeface="Amiri" pitchFamily="2" charset="-78"/>
               </a:rPr>
               <a:t>وَرْشَةُ الكِتَابَةِ — الامْتِحَانُ التَّجْرِيبِيُّ النِّهَائِيُّ</a:t>
@@ -3171,6 +3185,7 @@
                   <a:srgbClr val="D4AF37"/>
                 </a:solidFill>
                 <a:latin typeface="Amiri" pitchFamily="2" charset="-78"/>
+                <a:ea typeface="Amiri" pitchFamily="2" charset="-78"/>
                 <a:cs typeface="Amiri" pitchFamily="2" charset="-78"/>
               </a:rPr>
               <a:t>م</a:t>
@@ -3491,6 +3506,7 @@
                   <a:srgbClr val="8A6D1E"/>
                 </a:solidFill>
                 <a:latin typeface="Amiri" pitchFamily="2" charset="-78"/>
+                <a:ea typeface="Amiri" pitchFamily="2" charset="-78"/>
                 <a:cs typeface="Amiri" pitchFamily="2" charset="-78"/>
               </a:rPr>
               <a:t>نَمُوذَجُ الإِجَابَةِ</a:t>
@@ -3604,6 +3620,7 @@
                   <a:srgbClr val="1F2A37"/>
                 </a:solidFill>
                 <a:latin typeface="Amiri" pitchFamily="2" charset="-78"/>
+                <a:ea typeface="Amiri" pitchFamily="2" charset="-78"/>
                 <a:cs typeface="Amiri" pitchFamily="2" charset="-78"/>
               </a:rPr>
               <a:t>عَزِيزَتِي مَرْيَمُ،</a:t>
@@ -3623,6 +3640,7 @@
                   <a:srgbClr val="1F2A37"/>
                 </a:solidFill>
                 <a:latin typeface="Amiri" pitchFamily="2" charset="-78"/>
+                <a:ea typeface="Amiri" pitchFamily="2" charset="-78"/>
                 <a:cs typeface="Amiri" pitchFamily="2" charset="-78"/>
               </a:rPr>
               <a:t>السَّلَامُ عَلَيْكُمْ! كَيْفَ حَالُكِ؟ احْتَفَلْنَا بِعِيدِ الفِطْرِ يَوْمَ الأَحَدِ المَاضِي فِي بَيْتِ جَدَّتِي فِي بِرْمِنْغْهَامَ. فِي الصَّبَاحِ صَلَّيْنَا صَلَاةَ العِيدِ فِي المَسْجِدِ، ثُمَّ لَبِسْتُ فُسْتَانًا أَخْضَرَ جَدِيدًا. اجْتَمَعَتْ كُلُّ العَائِلَةِ، وَكَانَ عَدَدُنَا عِشْرِينَ شَخْصًا! أَكَلْنَا المَعْمُولَ وَالكَبْسَةَ، وَأَعْطَانِي عَمِّي عِيدِيَّةً. أُحِبُّ العِيدَ كَثِيرًا، لِأَنَّ العَائِلَةَ تَجْتَمِعُ وَالجَمِيعُ سُعَدَاءُ. فِي العِيدِ القَادِمِ سَأُسَاعِدُ أُمِّي فِي صُنْعِ الحَلَوِيَّاتِ. وَأَنْتِ، كَيْفَ احْتَفَلْتِ بِالعِيدِ؟</a:t>
@@ -3642,6 +3660,7 @@
                   <a:srgbClr val="1F2A37"/>
                 </a:solidFill>
                 <a:latin typeface="Amiri" pitchFamily="2" charset="-78"/>
+                <a:ea typeface="Amiri" pitchFamily="2" charset="-78"/>
                 <a:cs typeface="Amiri" pitchFamily="2" charset="-78"/>
               </a:rPr>
               <a:t>مَعَ مَحَبَّتِي،</a:t>
@@ -3661,6 +3680,7 @@
                   <a:srgbClr val="1F2A37"/>
                 </a:solidFill>
                 <a:latin typeface="Amiri" pitchFamily="2" charset="-78"/>
+                <a:ea typeface="Amiri" pitchFamily="2" charset="-78"/>
                 <a:cs typeface="Amiri" pitchFamily="2" charset="-78"/>
               </a:rPr>
               <a:t>خَدِيجَةُ</a:t>
@@ -3824,11 +3844,12 @@
               <a:buNone/>
             </a:pPr>
             <a:r>
-              <a:rPr lang="en-US" sz="950" b="1" dirty="0">
+              <a:rPr lang="ar-SA" sz="950" b="1" dirty="0">
                 <a:solidFill>
                   <a:srgbClr val="FFFFFF"/>
                 </a:solidFill>
                 <a:latin typeface="Calibri" pitchFamily="34" charset="0"/>
+                <a:ea typeface="Amiri" pitchFamily="2" charset="-78"/>
                 <a:cs typeface="Amiri" pitchFamily="2" charset="-78"/>
               </a:rPr>
               <a:t>احْتَفَلْنَا بِعِيدِ الفِطْرِ</a:t>
@@ -3889,11 +3910,12 @@
               <a:buNone/>
             </a:pPr>
             <a:r>
-              <a:rPr lang="en-US" sz="950" b="1" dirty="0">
+              <a:rPr lang="ar-SA" sz="950" b="1" dirty="0">
                 <a:solidFill>
                   <a:srgbClr val="FFFFFF"/>
                 </a:solidFill>
                 <a:latin typeface="Calibri" pitchFamily="34" charset="0"/>
+                <a:ea typeface="Amiri" pitchFamily="2" charset="-78"/>
                 <a:cs typeface="Amiri" pitchFamily="2" charset="-78"/>
               </a:rPr>
               <a:t>فُسْتَانًا أَخْضَرَ جَدِيدًا</a:t>
@@ -3954,11 +3976,12 @@
               <a:buNone/>
             </a:pPr>
             <a:r>
-              <a:rPr lang="en-US" sz="950" b="1" dirty="0">
+              <a:rPr lang="ar-SA" sz="950" b="1" dirty="0">
                 <a:solidFill>
                   <a:srgbClr val="FFFFFF"/>
                 </a:solidFill>
                 <a:latin typeface="Calibri" pitchFamily="34" charset="0"/>
+                <a:ea typeface="Amiri" pitchFamily="2" charset="-78"/>
                 <a:cs typeface="Amiri" pitchFamily="2" charset="-78"/>
               </a:rPr>
               <a:t>عِشْرِينَ شَخْصًا</a:t>
@@ -4019,11 +4042,12 @@
               <a:buNone/>
             </a:pPr>
             <a:r>
-              <a:rPr lang="en-US" sz="950" b="1" dirty="0">
+              <a:rPr lang="ar-SA" sz="950" b="1" dirty="0">
                 <a:solidFill>
                   <a:srgbClr val="FFFFFF"/>
                 </a:solidFill>
                 <a:latin typeface="Calibri" pitchFamily="34" charset="0"/>
+                <a:ea typeface="Amiri" pitchFamily="2" charset="-78"/>
                 <a:cs typeface="Amiri" pitchFamily="2" charset="-78"/>
               </a:rPr>
               <a:t>سَأُسَاعِدُ أُمِّي</a:t>
@@ -4157,6 +4181,7 @@
                   <a:srgbClr val="D4AF37"/>
                 </a:solidFill>
                 <a:latin typeface="Amiri" pitchFamily="2" charset="-78"/>
+                <a:ea typeface="Amiri" pitchFamily="2" charset="-78"/>
                 <a:cs typeface="Amiri" pitchFamily="2" charset="-78"/>
               </a:rPr>
               <a:t>م</a:t>
@@ -4477,6 +4502,7 @@
                   <a:srgbClr val="8A6D1E"/>
                 </a:solidFill>
                 <a:latin typeface="Amiri" pitchFamily="2" charset="-78"/>
+                <a:ea typeface="Amiri" pitchFamily="2" charset="-78"/>
                 <a:cs typeface="Amiri" pitchFamily="2" charset="-78"/>
               </a:rPr>
               <a:t>نَمُوذَجُ الإِجَابَةِ</a:t>
@@ -4590,6 +4616,7 @@
                   <a:srgbClr val="1F2A37"/>
                 </a:solidFill>
                 <a:latin typeface="Amiri" pitchFamily="2" charset="-78"/>
+                <a:ea typeface="Amiri" pitchFamily="2" charset="-78"/>
                 <a:cs typeface="Amiri" pitchFamily="2" charset="-78"/>
               </a:rPr>
               <a:t>عَزِيزَتِي مَرْيَمُ،</a:t>
@@ -4609,6 +4636,7 @@
                   <a:srgbClr val="1F2A37"/>
                 </a:solidFill>
                 <a:latin typeface="Amiri" pitchFamily="2" charset="-78"/>
+                <a:ea typeface="Amiri" pitchFamily="2" charset="-78"/>
                 <a:cs typeface="Amiri" pitchFamily="2" charset="-78"/>
               </a:rPr>
               <a:t>عِيدُكِ مُبَارَكٌ! أَكْتُبُ إِلَيْكِ لِأُخْبِرَكِ بِأَجْمَلِ عِيدِ فِطْرٍ قَضَيْتُهُ حَتَّى الآنَ، فَقَدِ اجْتَمَعَتْ عَائِلَتُنَا كُلُّهَا لِأَوَّلِ مَرَّةٍ مُنْذُ خَمْسِ سَنَوَاتٍ فِي بَيْتِ جَدَّتِي بِبِرْمِنْغْهَامَ. بَعْدَ صَلَاةِ العِيدِ، الَّتِي أُقِيمَتْ فِي الحَدِيقَةِ العَامَّةِ بِسَبَبِ كَثْرَةِ المُصَلِّينَ، عُدْنَا إِلَى البَيْتِ، فَوَجَدْنَا المَائِدَةَ مَلِيئَةً بِالكَبْسَةِ وَالمَعْمُولِ الَّذِي خَبَزَتْهُ جَدَّتِي بِنَفْسِهَا. وَمَعَ أَنَّ البَيْتَ كَانَ مُزْدَحِمًا وَصَاخِبًا، فَقَدْ شَعَرْتُ بِسَعَادَةٍ لَا تُوصَفُ وَأَنَا أَسْمَعُ ضَحِكَاتِ أَبْنَاءِ عُمُومَتِي. فِي رَأْيِي، العِيدُ أَهَمُّ مِنَ الهَدَايَا، لِأَنَّهُ يَصِلُ مَا قَطَعَتْهُ الأَيَّامُ. وَإِنْ شَاءَ اللّٰهُ، سَأَدْعُوكِ إِلَى بَيْتِنَا فِي العِيدِ القَادِمِ، فَهَلْ تَقْبَلِينَ؟</a:t>
@@ -4628,6 +4656,7 @@
                   <a:srgbClr val="1F2A37"/>
                 </a:solidFill>
                 <a:latin typeface="Amiri" pitchFamily="2" charset="-78"/>
+                <a:ea typeface="Amiri" pitchFamily="2" charset="-78"/>
                 <a:cs typeface="Amiri" pitchFamily="2" charset="-78"/>
               </a:rPr>
               <a:t>مَعَ أَطْيَبِ تَمَنِّيَاتِي،</a:t>
@@ -4647,6 +4676,7 @@
                   <a:srgbClr val="1F2A37"/>
                 </a:solidFill>
                 <a:latin typeface="Amiri" pitchFamily="2" charset="-78"/>
+                <a:ea typeface="Amiri" pitchFamily="2" charset="-78"/>
                 <a:cs typeface="Amiri" pitchFamily="2" charset="-78"/>
               </a:rPr>
               <a:t>خَدِيجَةُ</a:t>
@@ -4810,11 +4840,12 @@
               <a:buNone/>
             </a:pPr>
             <a:r>
-              <a:rPr lang="en-US" sz="950" b="1" dirty="0">
+              <a:rPr lang="ar-SA" sz="950" b="1" dirty="0">
                 <a:solidFill>
                   <a:srgbClr val="FFFFFF"/>
                 </a:solidFill>
                 <a:latin typeface="Calibri" pitchFamily="34" charset="0"/>
+                <a:ea typeface="Amiri" pitchFamily="2" charset="-78"/>
                 <a:cs typeface="Amiri" pitchFamily="2" charset="-78"/>
               </a:rPr>
               <a:t>لِأَوَّلِ مَرَّةٍ مُنْذُ</a:t>
@@ -4875,11 +4906,12 @@
               <a:buNone/>
             </a:pPr>
             <a:r>
-              <a:rPr lang="en-US" sz="950" b="1" dirty="0">
+              <a:rPr lang="ar-SA" sz="950" b="1" dirty="0">
                 <a:solidFill>
                   <a:srgbClr val="FFFFFF"/>
                 </a:solidFill>
                 <a:latin typeface="Calibri" pitchFamily="34" charset="0"/>
+                <a:ea typeface="Amiri" pitchFamily="2" charset="-78"/>
                 <a:cs typeface="Amiri" pitchFamily="2" charset="-78"/>
               </a:rPr>
               <a:t>الَّتِي أُقِيمَتْ</a:t>
@@ -4940,11 +4972,12 @@
               <a:buNone/>
             </a:pPr>
             <a:r>
-              <a:rPr lang="en-US" sz="950" b="1" dirty="0">
+              <a:rPr lang="ar-SA" sz="950" b="1" dirty="0">
                 <a:solidFill>
                   <a:srgbClr val="FFFFFF"/>
                 </a:solidFill>
                 <a:latin typeface="Calibri" pitchFamily="34" charset="0"/>
+                <a:ea typeface="Amiri" pitchFamily="2" charset="-78"/>
                 <a:cs typeface="Amiri" pitchFamily="2" charset="-78"/>
               </a:rPr>
               <a:t>مَعَ أَنَّ … فَقَدْ</a:t>
@@ -5005,11 +5038,12 @@
               <a:buNone/>
             </a:pPr>
             <a:r>
-              <a:rPr lang="en-US" sz="950" b="1" dirty="0">
+              <a:rPr lang="ar-SA" sz="950" b="1" dirty="0">
                 <a:solidFill>
                   <a:srgbClr val="FFFFFF"/>
                 </a:solidFill>
                 <a:latin typeface="Calibri" pitchFamily="34" charset="0"/>
+                <a:ea typeface="Amiri" pitchFamily="2" charset="-78"/>
                 <a:cs typeface="Amiri" pitchFamily="2" charset="-78"/>
               </a:rPr>
               <a:t>أَهَمُّ مِنَ الهَدَايَا</a:t>
@@ -5143,6 +5177,7 @@
                   <a:srgbClr val="D4AF37"/>
                 </a:solidFill>
                 <a:latin typeface="Amiri" pitchFamily="2" charset="-78"/>
+                <a:ea typeface="Amiri" pitchFamily="2" charset="-78"/>
                 <a:cs typeface="Amiri" pitchFamily="2" charset="-78"/>
               </a:rPr>
               <a:t>م</a:t>
@@ -5463,6 +5498,7 @@
                   <a:srgbClr val="8A6D1E"/>
                 </a:solidFill>
                 <a:latin typeface="Amiri" pitchFamily="2" charset="-78"/>
+                <a:ea typeface="Amiri" pitchFamily="2" charset="-78"/>
                 <a:cs typeface="Amiri" pitchFamily="2" charset="-78"/>
               </a:rPr>
               <a:t>اخْتَرْ عُنْوَانًا وَاحِدًا</a:t>
@@ -5743,6 +5779,7 @@
                   <a:srgbClr val="1B3B6F"/>
                 </a:solidFill>
                 <a:latin typeface="Amiri" pitchFamily="2" charset="-78"/>
+                <a:ea typeface="Amiri" pitchFamily="2" charset="-78"/>
                 <a:cs typeface="Amiri" pitchFamily="2" charset="-78"/>
               </a:rPr>
               <a:t>رِحْلَةٌ إِلَى بَلَدٍ عَرَبِيٍّ</a:t>
@@ -5781,6 +5818,7 @@
                   <a:srgbClr val="1B3B6F"/>
                 </a:solidFill>
                 <a:latin typeface="Amiri" pitchFamily="2" charset="-78"/>
+                <a:ea typeface="Amiri" pitchFamily="2" charset="-78"/>
                 <a:cs typeface="Amiri" pitchFamily="2" charset="-78"/>
               </a:rPr>
               <a:t>(أ)</a:t>
@@ -5887,6 +5925,7 @@
                   <a:srgbClr val="1B3B6F"/>
                 </a:solidFill>
                 <a:latin typeface="Amiri" pitchFamily="2" charset="-78"/>
+                <a:ea typeface="Amiri" pitchFamily="2" charset="-78"/>
                 <a:cs typeface="Amiri" pitchFamily="2" charset="-78"/>
               </a:rPr>
               <a:t>إِلَى أَيْنَ وَمَتَى وَمَعَ مَنْ · السَّفَرُ وَالمَكَانُ وَالطَّقْسُ · مَا فَعَلْتِ وَمَوْقِفٌ لَا تَنْسَيْنَهُ · رَأْيُكِ وَخُطَطُكِ</a:t>
@@ -6018,6 +6057,7 @@
                   <a:srgbClr val="1B3B6F"/>
                 </a:solidFill>
                 <a:latin typeface="Amiri" pitchFamily="2" charset="-78"/>
+                <a:ea typeface="Amiri" pitchFamily="2" charset="-78"/>
                 <a:cs typeface="Amiri" pitchFamily="2" charset="-78"/>
               </a:rPr>
               <a:t>هَلِ التَّعَلُّمُ عَبْرَ الإِنْتَرْنِتْ أَفْضَلُ مِنَ المَدْرَسَةِ؟</a:t>
@@ -6056,6 +6096,7 @@
                   <a:srgbClr val="1B3B6F"/>
                 </a:solidFill>
                 <a:latin typeface="Amiri" pitchFamily="2" charset="-78"/>
+                <a:ea typeface="Amiri" pitchFamily="2" charset="-78"/>
                 <a:cs typeface="Amiri" pitchFamily="2" charset="-78"/>
               </a:rPr>
               <a:t>(ب)</a:t>
@@ -6159,6 +6200,7 @@
                   <a:srgbClr val="1B3B6F"/>
                 </a:solidFill>
                 <a:latin typeface="Amiri" pitchFamily="2" charset="-78"/>
+                <a:ea typeface="Amiri" pitchFamily="2" charset="-78"/>
                 <a:cs typeface="Amiri" pitchFamily="2" charset="-78"/>
               </a:rPr>
               <a:t>المَوْضُوعُ · المَزَايَا وَالعُيُوبُ · مِثَالٌ مِنْ تَجْرِبَتِكِ · رَأْيُكِ</a:t>
@@ -6358,6 +6400,7 @@
                   <a:srgbClr val="D4AF37"/>
                 </a:solidFill>
                 <a:latin typeface="Amiri" pitchFamily="2" charset="-78"/>
+                <a:ea typeface="Amiri" pitchFamily="2" charset="-78"/>
                 <a:cs typeface="Amiri" pitchFamily="2" charset="-78"/>
               </a:rPr>
               <a:t>م</a:t>
@@ -6678,6 +6721,7 @@
                   <a:srgbClr val="8A6D1E"/>
                 </a:solidFill>
                 <a:latin typeface="Amiri" pitchFamily="2" charset="-78"/>
+                <a:ea typeface="Amiri" pitchFamily="2" charset="-78"/>
                 <a:cs typeface="Amiri" pitchFamily="2" charset="-78"/>
               </a:rPr>
               <a:t>خُطَّةُ الكِتَابَةِ</a:t>
@@ -7302,6 +7346,7 @@
                   <a:srgbClr val="1B3B6F"/>
                 </a:solidFill>
                 <a:latin typeface="Amiri" pitchFamily="2" charset="-78"/>
+                <a:ea typeface="Amiri" pitchFamily="2" charset="-78"/>
                 <a:cs typeface="Amiri" pitchFamily="2" charset="-78"/>
               </a:rPr>
               <a:t>كُنْتُ مُتَحَمِّسَةً جِدًّا، لِأَنِّي أَدْرُسُ العَرَبِيَّةَ.</a:t>
@@ -7401,6 +7446,7 @@
                   <a:srgbClr val="1B3B6F"/>
                 </a:solidFill>
                 <a:latin typeface="Amiri" pitchFamily="2" charset="-78"/>
+                <a:ea typeface="Amiri" pitchFamily="2" charset="-78"/>
                 <a:cs typeface="Amiri" pitchFamily="2" charset="-78"/>
               </a:rPr>
               <a:t>أَظُنُّ أَنَّ الأُرْدُنَّ أَجْمَلُ بَلَدٍ زُرْتُهُ.</a:t>
@@ -7500,6 +7546,7 @@
                   <a:srgbClr val="1B3B6F"/>
                 </a:solidFill>
                 <a:latin typeface="Amiri" pitchFamily="2" charset="-78"/>
+                <a:ea typeface="Amiri" pitchFamily="2" charset="-78"/>
                 <a:cs typeface="Amiri" pitchFamily="2" charset="-78"/>
               </a:rPr>
               <a:t>فِي المُسْتَقْبَلِ سَأَزُورُ مِصْرَ وَالمَغْرِبَ.</a:t>
@@ -7661,6 +7708,7 @@
                   <a:srgbClr val="1F2A37"/>
                 </a:solidFill>
                 <a:latin typeface="Amiri" pitchFamily="2" charset="-78"/>
+                <a:ea typeface="Amiri" pitchFamily="2" charset="-78"/>
                 <a:cs typeface="Amiri" pitchFamily="2" charset="-78"/>
               </a:rPr>
               <a:t>أ</a:t>
@@ -7687,6 +7735,7 @@
                   <a:srgbClr val="1F2A37"/>
                 </a:solidFill>
                 <a:latin typeface="Amiri" pitchFamily="2" charset="-78"/>
+                <a:ea typeface="Amiri" pitchFamily="2" charset="-78"/>
                 <a:cs typeface="Amiri" pitchFamily="2" charset="-78"/>
               </a:rPr>
               <a:t>ب</a:t>
@@ -7833,6 +7882,7 @@
                   <a:srgbClr val="D4AF37"/>
                 </a:solidFill>
                 <a:latin typeface="Amiri" pitchFamily="2" charset="-78"/>
+                <a:ea typeface="Amiri" pitchFamily="2" charset="-78"/>
                 <a:cs typeface="Amiri" pitchFamily="2" charset="-78"/>
               </a:rPr>
               <a:t>م</a:t>
@@ -8090,6 +8140,7 @@
                   <a:srgbClr val="8A6D1E"/>
                 </a:solidFill>
                 <a:latin typeface="Amiri" pitchFamily="2" charset="-78"/>
+                <a:ea typeface="Amiri" pitchFamily="2" charset="-78"/>
                 <a:cs typeface="Amiri" pitchFamily="2" charset="-78"/>
               </a:rPr>
               <a:t>أ</a:t>
@@ -8154,6 +8205,7 @@
                   <a:srgbClr val="1B3B6F"/>
                 </a:solidFill>
                 <a:latin typeface="Amiri" pitchFamily="2" charset="-78"/>
+                <a:ea typeface="Amiri" pitchFamily="2" charset="-78"/>
                 <a:cs typeface="Amiri" pitchFamily="2" charset="-78"/>
               </a:rPr>
               <a:t>أ</a:t>
@@ -8205,6 +8257,7 @@
                   <a:srgbClr val="8A6D1E"/>
                 </a:solidFill>
                 <a:latin typeface="Amiri" pitchFamily="2" charset="-78"/>
+                <a:ea typeface="Amiri" pitchFamily="2" charset="-78"/>
                 <a:cs typeface="Amiri" pitchFamily="2" charset="-78"/>
               </a:rPr>
               <a:t>نَمُوذَجُ الإِجَابَةِ</a:t>
@@ -8318,6 +8371,7 @@
                   <a:srgbClr val="1F2A37"/>
                 </a:solidFill>
                 <a:latin typeface="Amiri" pitchFamily="2" charset="-78"/>
+                <a:ea typeface="Amiri" pitchFamily="2" charset="-78"/>
                 <a:cs typeface="Amiri" pitchFamily="2" charset="-78"/>
               </a:rPr>
               <a:t>فِي الصَّيْفِ المَاضِي سَافَرْتُ مَعَ عَائِلَتِي إِلَى الأُرْدُنِّ لِمُدَّةِ عَشَرَةِ أَيَّامٍ. كَانَتْ هٰذِهِ أَوَّلَ رِحْلَةٍ لِي إِلَى بَلَدٍ عَرَبِيٍّ، وَكُنْتُ مُتَحَمِّسَةً جِدًّا، لِأَنِّي أَدْرُسُ العَرَبِيَّةَ مُنْذُ ثَلَاثِ سَنَوَاتٍ.</a:t>
@@ -8337,6 +8391,7 @@
                   <a:srgbClr val="1F2A37"/>
                 </a:solidFill>
                 <a:latin typeface="Amiri" pitchFamily="2" charset="-78"/>
+                <a:ea typeface="Amiri" pitchFamily="2" charset="-78"/>
                 <a:cs typeface="Amiri" pitchFamily="2" charset="-78"/>
               </a:rPr>
               <a:t>سَافَرْنَا بِالطَّائِرَةِ مِنْ لَنْدَنَ إِلَى عَمَّانَ، وَاسْتَغْرَقَتِ الرِّحْلَةُ خَمْسَ سَاعَاتٍ. نَزَلْنَا فِي فُنْدُقٍ جَمِيلٍ فِي وَسَطِ المَدِينَةِ، وَكَانَتْ غُرْفَتِي تُطِلُّ عَلَى جَبَلٍ كَبِيرٍ. كَانَ الجَوُّ حَارًّا جِدًّا، لٰكِنَّ النَّاسَ كَانُوا لُطَفَاءَ وَكُرَمَاءَ.</a:t>
@@ -8356,6 +8411,7 @@
                   <a:srgbClr val="1F2A37"/>
                 </a:solidFill>
                 <a:latin typeface="Amiri" pitchFamily="2" charset="-78"/>
+                <a:ea typeface="Amiri" pitchFamily="2" charset="-78"/>
                 <a:cs typeface="Amiri" pitchFamily="2" charset="-78"/>
               </a:rPr>
               <a:t>زُرْنَا البَتْرَاءَ، وَهِيَ مَدِينَةٌ قَدِيمَةٌ جَمِيلَةٌ، وَسَبَحْنَا فِي البَحْرِ المَيِّتِ، وَأَكَلْنَا المَنْسَفَ فِي مَطْعَمٍ شَعْبِيٍّ. فِي يَوْمٍ مِنَ الأَيَّامِ، تَكَلَّمْتُ بِالعَرَبِيَّةِ مَعَ بَائِعَةٍ فِي السُّوقِ، وَاشْتَرَيْتُ مِنْهَا وِشَاحًا أَحْمَرَ. كُنْتُ فَخُورَةً جِدًّا، لِأَنَّهَا فَهِمَتْنِي!</a:t>
@@ -8375,6 +8431,7 @@
                   <a:srgbClr val="1F2A37"/>
                 </a:solidFill>
                 <a:latin typeface="Amiri" pitchFamily="2" charset="-78"/>
+                <a:ea typeface="Amiri" pitchFamily="2" charset="-78"/>
                 <a:cs typeface="Amiri" pitchFamily="2" charset="-78"/>
               </a:rPr>
               <a:t>أَظُنُّ أَنَّ الأُرْدُنَّ أَجْمَلُ بَلَدٍ زُرْتُهُ. الآنَ أُرَاجِعُ العَرَبِيَّةَ كُلَّ يَوْمٍ، وَفِي المُسْتَقْبَلِ سَأَزُورُ مِصْرَ وَالمَغْرِبَ إِنْ شَاءَ اللّٰهُ.</a:t>
@@ -8538,11 +8595,12 @@
               <a:buNone/>
             </a:pPr>
             <a:r>
-              <a:rPr lang="en-US" sz="950" b="1" dirty="0">
+              <a:rPr lang="ar-SA" sz="950" b="1" dirty="0">
                 <a:solidFill>
                   <a:srgbClr val="FFFFFF"/>
                 </a:solidFill>
                 <a:latin typeface="Calibri" pitchFamily="34" charset="0"/>
+                <a:ea typeface="Amiri" pitchFamily="2" charset="-78"/>
                 <a:cs typeface="Amiri" pitchFamily="2" charset="-78"/>
               </a:rPr>
               <a:t>كُنْتُ مُتَحَمِّسَةً جِدًّا</a:t>
@@ -8603,11 +8661,12 @@
               <a:buNone/>
             </a:pPr>
             <a:r>
-              <a:rPr lang="en-US" sz="950" b="1" dirty="0">
+              <a:rPr lang="ar-SA" sz="950" b="1" dirty="0">
                 <a:solidFill>
                   <a:srgbClr val="FFFFFF"/>
                 </a:solidFill>
                 <a:latin typeface="Calibri" pitchFamily="34" charset="0"/>
+                <a:ea typeface="Amiri" pitchFamily="2" charset="-78"/>
                 <a:cs typeface="Amiri" pitchFamily="2" charset="-78"/>
               </a:rPr>
               <a:t>وَاسْتَغْرَقَتِ الرِّحْلَةُ</a:t>
@@ -8668,11 +8727,12 @@
               <a:buNone/>
             </a:pPr>
             <a:r>
-              <a:rPr lang="en-US" sz="950" b="1" dirty="0">
+              <a:rPr lang="ar-SA" sz="950" b="1" dirty="0">
                 <a:solidFill>
                   <a:srgbClr val="FFFFFF"/>
                 </a:solidFill>
                 <a:latin typeface="Calibri" pitchFamily="34" charset="0"/>
+                <a:ea typeface="Amiri" pitchFamily="2" charset="-78"/>
                 <a:cs typeface="Amiri" pitchFamily="2" charset="-78"/>
               </a:rPr>
               <a:t>وِشَاحًا أَحْمَرَ</a:t>
@@ -8733,11 +8793,12 @@
               <a:buNone/>
             </a:pPr>
             <a:r>
-              <a:rPr lang="en-US" sz="950" b="1" dirty="0">
+              <a:rPr lang="ar-SA" sz="950" b="1" dirty="0">
                 <a:solidFill>
                   <a:srgbClr val="FFFFFF"/>
                 </a:solidFill>
                 <a:latin typeface="Calibri" pitchFamily="34" charset="0"/>
+                <a:ea typeface="Amiri" pitchFamily="2" charset="-78"/>
                 <a:cs typeface="Amiri" pitchFamily="2" charset="-78"/>
               </a:rPr>
               <a:t>أَجْمَلُ بَلَدٍ زُرْتُهُ</a:t>
@@ -8871,6 +8932,7 @@
                   <a:srgbClr val="D4AF37"/>
                 </a:solidFill>
                 <a:latin typeface="Amiri" pitchFamily="2" charset="-78"/>
+                <a:ea typeface="Amiri" pitchFamily="2" charset="-78"/>
                 <a:cs typeface="Amiri" pitchFamily="2" charset="-78"/>
               </a:rPr>
               <a:t>م</a:t>
@@ -9128,6 +9190,7 @@
                   <a:srgbClr val="8A6D1E"/>
                 </a:solidFill>
                 <a:latin typeface="Amiri" pitchFamily="2" charset="-78"/>
+                <a:ea typeface="Amiri" pitchFamily="2" charset="-78"/>
                 <a:cs typeface="Amiri" pitchFamily="2" charset="-78"/>
               </a:rPr>
               <a:t>أ</a:t>
@@ -9192,6 +9255,7 @@
                   <a:srgbClr val="1B3B6F"/>
                 </a:solidFill>
                 <a:latin typeface="Amiri" pitchFamily="2" charset="-78"/>
+                <a:ea typeface="Amiri" pitchFamily="2" charset="-78"/>
                 <a:cs typeface="Amiri" pitchFamily="2" charset="-78"/>
               </a:rPr>
               <a:t>أ</a:t>
@@ -9243,6 +9307,7 @@
                   <a:srgbClr val="8A6D1E"/>
                 </a:solidFill>
                 <a:latin typeface="Amiri" pitchFamily="2" charset="-78"/>
+                <a:ea typeface="Amiri" pitchFamily="2" charset="-78"/>
                 <a:cs typeface="Amiri" pitchFamily="2" charset="-78"/>
               </a:rPr>
               <a:t>نَمُوذَجُ الإِجَابَةِ</a:t>
@@ -9356,6 +9421,7 @@
                   <a:srgbClr val="1F2A37"/>
                 </a:solidFill>
                 <a:latin typeface="Amiri" pitchFamily="2" charset="-78"/>
+                <a:ea typeface="Amiri" pitchFamily="2" charset="-78"/>
                 <a:cs typeface="Amiri" pitchFamily="2" charset="-78"/>
               </a:rPr>
               <a:t>لَمْ أَكُنْ أَتَوَقَّعُ أَنَّ رِحْلَةً مُدَّتُهَا عَشَرَةُ أَيَّامٍ سَتُغَيِّرُ عَلَاقَتِي بِاللُّغَةِ العَرَبِيَّةِ، وَلٰكِنَّ هٰذَا مَا حَدَثَ عِنْدَمَا سَافَرْتُ مَعَ عَائِلَتِي إِلَى الأُرْدُنِّ فِي الصَّيْفِ المَاضِي.</a:t>
@@ -9375,6 +9441,7 @@
                   <a:srgbClr val="1F2A37"/>
                 </a:solidFill>
                 <a:latin typeface="Amiri" pitchFamily="2" charset="-78"/>
+                <a:ea typeface="Amiri" pitchFamily="2" charset="-78"/>
                 <a:cs typeface="Amiri" pitchFamily="2" charset="-78"/>
               </a:rPr>
               <a:t>هَبَطَتْ طَائِرَتُنَا فِي عَمَّانَ لَيْلًا، فَاسْتَقْبَلَنَا هَوَاءٌ دَافِئٌ يَحْمِلُ رَائِحَةَ القَهْوَةِ وَالهَيْلِ، وَكَانَ خَالِي يَنْتَظِرُنَا بِابْتِسَامَتِهِ الوَاسِعَةِ. وَفِي الأَيَّامِ التَّالِيَةِ، تَجَوَّلْنَا بَيْنَ أَسْوَاقِ المَدِينَةِ القَدِيمَةِ، ثُمَّ مَشَيْنَا فِي البَتْرَاءِ، تِلْكَ المَدِينَةِ الوَرْدِيَّةِ الَّتِي نُحِتَتْ فِي الصَّخْرِ قَبْلَ أَلْفَيْ عَامٍ، وَسَبَحْنَا فِي البَحْرِ المَيِّتِ الَّذِي يَطْفُو فِيهِ الإِنْسَانُ دُونَ جُهْدٍ.</a:t>
@@ -9394,6 +9461,7 @@
                   <a:srgbClr val="1F2A37"/>
                 </a:solidFill>
                 <a:latin typeface="Amiri" pitchFamily="2" charset="-78"/>
+                <a:ea typeface="Amiri" pitchFamily="2" charset="-78"/>
                 <a:cs typeface="Amiri" pitchFamily="2" charset="-78"/>
               </a:rPr>
               <a:t>غَيْرَ أَنَّ أَجْمَلَ لَحْظَةٍ لَمْ تَكُنْ فِي مَكَانٍ سِيَاحِيٍّ، بَلْ فِي دُكَّانٍ صَغِيرٍ، حِينَ تَحَدَّثْتُ مَعَ بَائِعَةٍ عَجُوزٍ عَنْ عَائِلَتِهَا، فَابْتَسَمَتْ وَقَالَتْ: "عَرَبِيَّتُكِ جَمِيلَةٌ يَا بِنْتِي". عِنْدَئِذٍ أَدْرَكْتُ أَنَّ سَنَوَاتِ الدِّرَاسَةِ أَمَامَ الشَّاشَةِ لَمْ تَضِعْ سُدًى.</a:t>
@@ -9413,6 +9481,7 @@
                   <a:srgbClr val="1F2A37"/>
                 </a:solidFill>
                 <a:latin typeface="Amiri" pitchFamily="2" charset="-78"/>
+                <a:ea typeface="Amiri" pitchFamily="2" charset="-78"/>
                 <a:cs typeface="Amiri" pitchFamily="2" charset="-78"/>
               </a:rPr>
               <a:t>مُنْذُ عَوْدَتِي صِرْتُ أُرَاجِعُ بِحَمَاسٍ أَكْبَرَ، وَأُشَاهِدُ الأَخْبَارَ بِالعَرَبِيَّةِ كُلَّ مَسَاءٍ. وَلَوْ أُتِيحَتْ لِي الفُرْصَةُ، لَدَرَسْتُ سَنَةً كَامِلَةً فِي عَمَّانَ بَعْدَ المَدْرَسَةِ.</a:t>
@@ -9511,11 +9580,12 @@
               <a:buNone/>
             </a:pPr>
             <a:r>
-              <a:rPr lang="en-US" sz="950" b="1" dirty="0">
+              <a:rPr lang="ar-SA" sz="950" b="1" dirty="0">
                 <a:solidFill>
                   <a:srgbClr val="FFFFFF"/>
                 </a:solidFill>
                 <a:latin typeface="Calibri" pitchFamily="34" charset="0"/>
+                <a:ea typeface="Amiri" pitchFamily="2" charset="-78"/>
                 <a:cs typeface="Amiri" pitchFamily="2" charset="-78"/>
               </a:rPr>
               <a:t>لَمْ أَكُنْ أَتَوَقَّعُ</a:t>
@@ -9576,11 +9646,12 @@
               <a:buNone/>
             </a:pPr>
             <a:r>
-              <a:rPr lang="en-US" sz="950" b="1" dirty="0">
+              <a:rPr lang="ar-SA" sz="950" b="1" dirty="0">
                 <a:solidFill>
                   <a:srgbClr val="FFFFFF"/>
                 </a:solidFill>
                 <a:latin typeface="Calibri" pitchFamily="34" charset="0"/>
+                <a:ea typeface="Amiri" pitchFamily="2" charset="-78"/>
                 <a:cs typeface="Amiri" pitchFamily="2" charset="-78"/>
               </a:rPr>
               <a:t>الَّتِي نُحِتَتْ فِي الصَّخْرِ</a:t>
@@ -9641,11 +9712,12 @@
               <a:buNone/>
             </a:pPr>
             <a:r>
-              <a:rPr lang="en-US" sz="950" b="1" dirty="0">
+              <a:rPr lang="ar-SA" sz="950" b="1" dirty="0">
                 <a:solidFill>
                   <a:srgbClr val="FFFFFF"/>
                 </a:solidFill>
                 <a:latin typeface="Calibri" pitchFamily="34" charset="0"/>
+                <a:ea typeface="Amiri" pitchFamily="2" charset="-78"/>
                 <a:cs typeface="Amiri" pitchFamily="2" charset="-78"/>
               </a:rPr>
               <a:t>لَمْ تَكُنْ … بَلْ</a:t>
@@ -9706,11 +9778,12 @@
               <a:buNone/>
             </a:pPr>
             <a:r>
-              <a:rPr lang="en-US" sz="950" b="1" dirty="0">
+              <a:rPr lang="ar-SA" sz="950" b="1" dirty="0">
                 <a:solidFill>
                   <a:srgbClr val="FFFFFF"/>
                 </a:solidFill>
                 <a:latin typeface="Calibri" pitchFamily="34" charset="0"/>
+                <a:ea typeface="Amiri" pitchFamily="2" charset="-78"/>
                 <a:cs typeface="Amiri" pitchFamily="2" charset="-78"/>
               </a:rPr>
               <a:t>وَلَوْ أُتِيحَتْ … لَدَرَسْتُ</a:t>
@@ -9844,6 +9917,7 @@
                   <a:srgbClr val="D4AF37"/>
                 </a:solidFill>
                 <a:latin typeface="Amiri" pitchFamily="2" charset="-78"/>
+                <a:ea typeface="Amiri" pitchFamily="2" charset="-78"/>
                 <a:cs typeface="Amiri" pitchFamily="2" charset="-78"/>
               </a:rPr>
               <a:t>م</a:t>
@@ -10101,6 +10175,7 @@
                   <a:srgbClr val="8A6D1E"/>
                 </a:solidFill>
                 <a:latin typeface="Amiri" pitchFamily="2" charset="-78"/>
+                <a:ea typeface="Amiri" pitchFamily="2" charset="-78"/>
                 <a:cs typeface="Amiri" pitchFamily="2" charset="-78"/>
               </a:rPr>
               <a:t>ب</a:t>
@@ -10165,6 +10240,7 @@
                   <a:srgbClr val="1B3B6F"/>
                 </a:solidFill>
                 <a:latin typeface="Amiri" pitchFamily="2" charset="-78"/>
+                <a:ea typeface="Amiri" pitchFamily="2" charset="-78"/>
                 <a:cs typeface="Amiri" pitchFamily="2" charset="-78"/>
               </a:rPr>
               <a:t>ب</a:t>
@@ -10216,6 +10292,7 @@
                   <a:srgbClr val="8A6D1E"/>
                 </a:solidFill>
                 <a:latin typeface="Amiri" pitchFamily="2" charset="-78"/>
+                <a:ea typeface="Amiri" pitchFamily="2" charset="-78"/>
                 <a:cs typeface="Amiri" pitchFamily="2" charset="-78"/>
               </a:rPr>
               <a:t>نَمُوذَجُ الإِجَابَةِ</a:t>
@@ -10329,6 +10406,7 @@
                   <a:srgbClr val="1F2A37"/>
                 </a:solidFill>
                 <a:latin typeface="Amiri" pitchFamily="2" charset="-78"/>
+                <a:ea typeface="Amiri" pitchFamily="2" charset="-78"/>
                 <a:cs typeface="Amiri" pitchFamily="2" charset="-78"/>
               </a:rPr>
               <a:t>مُنْذُ سَنَوَاتٍ قَلِيلَةٍ، كَانَ التَّعَلُّمُ عَبْرَ الإِنْتَرْنِتْ فِكْرَةً غَرِيبَةً، أَمَّا اليَوْمَ فَيَدْرُسُ آلَافُ الطُّلَّابِ فِي مَدَارِسَ إِلِكْتُرُونِيَّةٍ كَامِلَةٍ. فَهَلْ هٰذَا النَّوْعُ مِنَ التَّعَلُّمِ أَفْضَلُ مِنَ المَدْرَسَةِ التَّقْلِيدِيَّةِ؟</a:t>
@@ -10348,6 +10426,7 @@
                   <a:srgbClr val="1F2A37"/>
                 </a:solidFill>
                 <a:latin typeface="Amiri" pitchFamily="2" charset="-78"/>
+                <a:ea typeface="Amiri" pitchFamily="2" charset="-78"/>
                 <a:cs typeface="Amiri" pitchFamily="2" charset="-78"/>
               </a:rPr>
               <a:t>مِنْ نَاحِيَةٍ، يُوَفِّرُ التَّعَلُّمُ عَبْرَ الإِنْتَرْنِتْ الوَقْتَ وَالمَالَ، إِذْ لَا يَحْتَاجُ الطَّالِبُ إِلَى المُوَاصَلَاتِ، كَمَا يُمْكِنُهُ أَنْ يُعِيدَ مُشَاهَدَةَ الدُّرُوسِ المُسَجَّلَةِ مَتَى شَاءَ، وَأَنْ يَتَعَلَّمَ بِالسُّرْعَةِ الَّتِي تُنَاسِبُهُ. وَمِنْ نَاحِيَةٍ أُخْرَى، يَفْتَقِدُ كَثِيرٌ مِنَ الطُّلَّابِ الأَصْدِقَاءَ وَالأَنْشِطَةَ الرِّيَاضِيَّةَ، مِمَّا قَدْ يُشْعِرُهُمْ بِالوَحْدَةِ.</a:t>
@@ -10367,6 +10446,7 @@
                   <a:srgbClr val="1F2A37"/>
                 </a:solidFill>
                 <a:latin typeface="Amiri" pitchFamily="2" charset="-78"/>
+                <a:ea typeface="Amiri" pitchFamily="2" charset="-78"/>
                 <a:cs typeface="Amiri" pitchFamily="2" charset="-78"/>
               </a:rPr>
               <a:t>وَقَدْ عِشْتُ التَّجْرِبَتَيْنِ؛ فَفِي مَدْرَسَتِي القَدِيمَةِ كُنْتُ أَقْضِي سَاعَةً كُلَّ يَوْمٍ فِي الحَافِلَةِ، بَيْنَمَا أَسْتَغِلُّ هٰذِهِ السَّاعَةَ الآنَ فِي القِرَاءَةِ. وَمَعَ ذٰلِكَ، فَإِنَّنِي أَشْتَاقُ أَحْيَانًا إِلَى الضَّحِكِ مَعَ زَمِيلَاتِي فِي السَّاحَةِ، وَإِلَى الحِصَصِ العَمَلِيَّةِ فِي المُخْتَبَرِ.</a:t>
@@ -10386,6 +10466,7 @@
                   <a:srgbClr val="1F2A37"/>
                 </a:solidFill>
                 <a:latin typeface="Amiri" pitchFamily="2" charset="-78"/>
+                <a:ea typeface="Amiri" pitchFamily="2" charset="-78"/>
                 <a:cs typeface="Amiri" pitchFamily="2" charset="-78"/>
               </a:rPr>
               <a:t>لِذٰلِكَ أَرَى أَنَّ النَّجَاحَ لَا يَتَوَقَّفُ عَلَى المَكَانِ، بَلْ عَلَى انْضِبَاطِ الطَّالِبِ وَجَوْدَةِ المُعَلِّمِ. وَإِذَا جَمَعَتِ المَدَارِسُ بَيْنَ الطَّرِيقَتَيْنِ، فَسَيَحْصُلُ الطُّلَّابُ عَلَى أَفْضَلِ مَا فِيهِمَا.</a:t>
@@ -10484,11 +10565,12 @@
               <a:buNone/>
             </a:pPr>
             <a:r>
-              <a:rPr lang="en-US" sz="950" b="1" dirty="0">
+              <a:rPr lang="ar-SA" sz="950" b="1" dirty="0">
                 <a:solidFill>
                   <a:srgbClr val="FFFFFF"/>
                 </a:solidFill>
                 <a:latin typeface="Calibri" pitchFamily="34" charset="0"/>
+                <a:ea typeface="Amiri" pitchFamily="2" charset="-78"/>
                 <a:cs typeface="Amiri" pitchFamily="2" charset="-78"/>
               </a:rPr>
               <a:t>أَمَّا اليَوْمَ فَيَدْرُسُ</a:t>
@@ -10549,11 +10631,12 @@
               <a:buNone/>
             </a:pPr>
             <a:r>
-              <a:rPr lang="en-US" sz="950" b="1" dirty="0">
+              <a:rPr lang="ar-SA" sz="950" b="1" dirty="0">
                 <a:solidFill>
                   <a:srgbClr val="FFFFFF"/>
                 </a:solidFill>
                 <a:latin typeface="Calibri" pitchFamily="34" charset="0"/>
+                <a:ea typeface="Amiri" pitchFamily="2" charset="-78"/>
                 <a:cs typeface="Amiri" pitchFamily="2" charset="-78"/>
               </a:rPr>
               <a:t>إِذْ لَا يَحْتَاجُ</a:t>
@@ -10614,11 +10697,12 @@
               <a:buNone/>
             </a:pPr>
             <a:r>
-              <a:rPr lang="en-US" sz="950" b="1" dirty="0">
+              <a:rPr lang="ar-SA" sz="950" b="1" dirty="0">
                 <a:solidFill>
                   <a:srgbClr val="FFFFFF"/>
                 </a:solidFill>
                 <a:latin typeface="Calibri" pitchFamily="34" charset="0"/>
+                <a:ea typeface="Amiri" pitchFamily="2" charset="-78"/>
                 <a:cs typeface="Amiri" pitchFamily="2" charset="-78"/>
               </a:rPr>
               <a:t>عِشْتُ التَّجْرِبَتَيْنِ</a:t>
@@ -10679,11 +10763,12 @@
               <a:buNone/>
             </a:pPr>
             <a:r>
-              <a:rPr lang="en-US" sz="950" b="1" dirty="0">
+              <a:rPr lang="ar-SA" sz="950" b="1" dirty="0">
                 <a:solidFill>
                   <a:srgbClr val="FFFFFF"/>
                 </a:solidFill>
                 <a:latin typeface="Calibri" pitchFamily="34" charset="0"/>
+                <a:ea typeface="Amiri" pitchFamily="2" charset="-78"/>
                 <a:cs typeface="Amiri" pitchFamily="2" charset="-78"/>
               </a:rPr>
               <a:t>لَا يَتَوَقَّفُ عَلَى … بَلْ</a:t>
@@ -10817,6 +10902,7 @@
                   <a:srgbClr val="D4AF37"/>
                 </a:solidFill>
                 <a:latin typeface="Amiri" pitchFamily="2" charset="-78"/>
+                <a:ea typeface="Amiri" pitchFamily="2" charset="-78"/>
                 <a:cs typeface="Amiri" pitchFamily="2" charset="-78"/>
               </a:rPr>
               <a:t>م</a:t>
@@ -11137,6 +11223,7 @@
                   <a:srgbClr val="8A6D1E"/>
                 </a:solidFill>
                 <a:latin typeface="Amiri" pitchFamily="2" charset="-78"/>
+                <a:ea typeface="Amiri" pitchFamily="2" charset="-78"/>
                 <a:cs typeface="Amiri" pitchFamily="2" charset="-78"/>
               </a:rPr>
               <a:t>قَيِّمْ عَمَلَكَ</a:t>
@@ -12381,6 +12468,7 @@
                   <a:srgbClr val="FFFFFF"/>
                 </a:solidFill>
                 <a:latin typeface="Amiri" pitchFamily="2" charset="-78"/>
+                <a:ea typeface="Amiri" pitchFamily="2" charset="-78"/>
                 <a:cs typeface="Amiri" pitchFamily="2" charset="-78"/>
               </a:rPr>
               <a:t>أَحْسَنْتُمْ! إِلَى اللِّقَاءِ</a:t>
@@ -12533,6 +12621,7 @@
                   <a:srgbClr val="D4AF37"/>
                 </a:solidFill>
                 <a:latin typeface="Amiri" pitchFamily="2" charset="-78"/>
+                <a:ea typeface="Amiri" pitchFamily="2" charset="-78"/>
                 <a:cs typeface="Amiri" pitchFamily="2" charset="-78"/>
               </a:rPr>
               <a:t>بِالتَّوْفِيقِ فِي الامْتِحَانِ</a:t>
@@ -12666,6 +12755,7 @@
                   <a:srgbClr val="D4AF37"/>
                 </a:solidFill>
                 <a:latin typeface="Amiri" pitchFamily="2" charset="-78"/>
+                <a:ea typeface="Amiri" pitchFamily="2" charset="-78"/>
                 <a:cs typeface="Amiri" pitchFamily="2" charset="-78"/>
               </a:rPr>
               <a:t>م</a:t>
@@ -12986,6 +13076,7 @@
                   <a:srgbClr val="8A6D1E"/>
                 </a:solidFill>
                 <a:latin typeface="Amiri" pitchFamily="2" charset="-78"/>
+                <a:ea typeface="Amiri" pitchFamily="2" charset="-78"/>
                 <a:cs typeface="Amiri" pitchFamily="2" charset="-78"/>
               </a:rPr>
               <a:t>آدَابُ الصَّفِّ</a:t>
@@ -14517,6 +14608,7 @@
                   <a:srgbClr val="D4AF37"/>
                 </a:solidFill>
                 <a:latin typeface="Amiri" pitchFamily="2" charset="-78"/>
+                <a:ea typeface="Amiri" pitchFamily="2" charset="-78"/>
                 <a:cs typeface="Amiri" pitchFamily="2" charset="-78"/>
               </a:rPr>
               <a:t>م</a:t>
@@ -14837,6 +14929,7 @@
                   <a:srgbClr val="8A6D1E"/>
                 </a:solidFill>
                 <a:latin typeface="Amiri" pitchFamily="2" charset="-78"/>
+                <a:ea typeface="Amiri" pitchFamily="2" charset="-78"/>
                 <a:cs typeface="Amiri" pitchFamily="2" charset="-78"/>
               </a:rPr>
               <a:t>خَرِيطَةُ الوَرْشَةِ</a:t>
@@ -15151,6 +15244,7 @@
                   <a:srgbClr val="1B3B6F"/>
                 </a:solidFill>
                 <a:latin typeface="Amiri" pitchFamily="2" charset="-78"/>
+                <a:ea typeface="Amiri" pitchFamily="2" charset="-78"/>
                 <a:cs typeface="Amiri" pitchFamily="2" charset="-78"/>
               </a:rPr>
               <a:t>كَيْفَ</a:t>
@@ -15427,6 +15521,7 @@
                   <a:srgbClr val="1E6B52"/>
                 </a:solidFill>
                 <a:latin typeface="Amiri" pitchFamily="2" charset="-78"/>
+                <a:ea typeface="Amiri" pitchFamily="2" charset="-78"/>
                 <a:cs typeface="Amiri" pitchFamily="2" charset="-78"/>
               </a:rPr>
               <a:t>الاسْتِمَارَةُ</a:t>
@@ -15703,6 +15798,7 @@
                   <a:srgbClr val="1E6B52"/>
                 </a:solidFill>
                 <a:latin typeface="Amiri" pitchFamily="2" charset="-78"/>
+                <a:ea typeface="Amiri" pitchFamily="2" charset="-78"/>
                 <a:cs typeface="Amiri" pitchFamily="2" charset="-78"/>
               </a:rPr>
               <a:t>الرِّسَالَةُ</a:t>
@@ -15979,6 +16075,7 @@
                   <a:srgbClr val="1E6B52"/>
                 </a:solidFill>
                 <a:latin typeface="Amiri" pitchFamily="2" charset="-78"/>
+                <a:ea typeface="Amiri" pitchFamily="2" charset="-78"/>
                 <a:cs typeface="Amiri" pitchFamily="2" charset="-78"/>
               </a:rPr>
               <a:t>المَقَالُ</a:t>
@@ -16255,6 +16352,7 @@
                   <a:srgbClr val="8A6D1E"/>
                 </a:solidFill>
                 <a:latin typeface="Amiri" pitchFamily="2" charset="-78"/>
+                <a:ea typeface="Amiri" pitchFamily="2" charset="-78"/>
                 <a:cs typeface="Amiri" pitchFamily="2" charset="-78"/>
               </a:rPr>
               <a:t>قَيِّمْ</a:t>
@@ -16498,6 +16596,7 @@
                   <a:srgbClr val="D4AF37"/>
                 </a:solidFill>
                 <a:latin typeface="Amiri" pitchFamily="2" charset="-78"/>
+                <a:ea typeface="Amiri" pitchFamily="2" charset="-78"/>
                 <a:cs typeface="Amiri" pitchFamily="2" charset="-78"/>
               </a:rPr>
               <a:t>م</a:t>
@@ -16818,6 +16917,7 @@
                   <a:srgbClr val="8A6D1E"/>
                 </a:solidFill>
                 <a:latin typeface="Amiri" pitchFamily="2" charset="-78"/>
+                <a:ea typeface="Amiri" pitchFamily="2" charset="-78"/>
                 <a:cs typeface="Amiri" pitchFamily="2" charset="-78"/>
               </a:rPr>
               <a:t>امْتِحَانُ الكِتَابَةِ</a:t>
@@ -17442,6 +17542,7 @@
                   <a:srgbClr val="1B3B6F"/>
                 </a:solidFill>
                 <a:latin typeface="Amiri" pitchFamily="2" charset="-78"/>
+                <a:ea typeface="Amiri" pitchFamily="2" charset="-78"/>
                 <a:cs typeface="Amiri" pitchFamily="2" charset="-78"/>
               </a:rPr>
               <a:t>اجْتَمَعَتْ كُلُّ العَائِلَةِ، وَكَانَ عَدَدُنَا عِشْرِينَ شَخْصًا</a:t>
@@ -17541,6 +17642,7 @@
                   <a:srgbClr val="1B3B6F"/>
                 </a:solidFill>
                 <a:latin typeface="Amiri" pitchFamily="2" charset="-78"/>
+                <a:ea typeface="Amiri" pitchFamily="2" charset="-78"/>
                 <a:cs typeface="Amiri" pitchFamily="2" charset="-78"/>
               </a:rPr>
               <a:t>لَبِسْتُ فُسْتَانًا أَخْضَرَ جَدِيدًا</a:t>
@@ -17640,6 +17742,7 @@
                   <a:srgbClr val="1B3B6F"/>
                 </a:solidFill>
                 <a:latin typeface="Amiri" pitchFamily="2" charset="-78"/>
+                <a:ea typeface="Amiri" pitchFamily="2" charset="-78"/>
                 <a:cs typeface="Amiri" pitchFamily="2" charset="-78"/>
               </a:rPr>
               <a:t>أُحِبُّ العِيدَ كَثِيرًا، لِأَنَّ العَائِلَةَ تَجْتَمِعُ</a:t>
@@ -17811,6 +17914,7 @@
                   <a:srgbClr val="D4AF37"/>
                 </a:solidFill>
                 <a:latin typeface="Amiri" pitchFamily="2" charset="-78"/>
+                <a:ea typeface="Amiri" pitchFamily="2" charset="-78"/>
                 <a:cs typeface="Amiri" pitchFamily="2" charset="-78"/>
               </a:rPr>
               <a:t>م</a:t>
@@ -18131,6 +18235,7 @@
                   <a:srgbClr val="8A6D1E"/>
                 </a:solidFill>
                 <a:latin typeface="Amiri" pitchFamily="2" charset="-78"/>
+                <a:ea typeface="Amiri" pitchFamily="2" charset="-78"/>
                 <a:cs typeface="Amiri" pitchFamily="2" charset="-78"/>
               </a:rPr>
               <a:t>اسْتِمَارَةُ التَّسْجِيلِ فِي دَوْرَةٍ صَيْفِيَّةٍ</a:t>
@@ -18487,6 +18592,7 @@
                   <a:srgbClr val="1B3B6F"/>
                 </a:solidFill>
                 <a:latin typeface="Amiri" pitchFamily="2" charset="-78"/>
+                <a:ea typeface="Amiri" pitchFamily="2" charset="-78"/>
                 <a:cs typeface="Amiri" pitchFamily="2" charset="-78"/>
               </a:rPr>
               <a:t>الاسْمُ</a:t>
@@ -18731,6 +18837,7 @@
                   <a:srgbClr val="1B3B6F"/>
                 </a:solidFill>
                 <a:latin typeface="Amiri" pitchFamily="2" charset="-78"/>
+                <a:ea typeface="Amiri" pitchFamily="2" charset="-78"/>
                 <a:cs typeface="Amiri" pitchFamily="2" charset="-78"/>
               </a:rPr>
               <a:t>العُمُرُ</a:t>
@@ -18975,6 +19082,7 @@
                   <a:srgbClr val="1B3B6F"/>
                 </a:solidFill>
                 <a:latin typeface="Amiri" pitchFamily="2" charset="-78"/>
+                <a:ea typeface="Amiri" pitchFamily="2" charset="-78"/>
                 <a:cs typeface="Amiri" pitchFamily="2" charset="-78"/>
               </a:rPr>
               <a:t>الجِنْسِيَّةُ</a:t>
@@ -19219,6 +19327,7 @@
                   <a:srgbClr val="1B3B6F"/>
                 </a:solidFill>
                 <a:latin typeface="Amiri" pitchFamily="2" charset="-78"/>
+                <a:ea typeface="Amiri" pitchFamily="2" charset="-78"/>
                 <a:cs typeface="Amiri" pitchFamily="2" charset="-78"/>
               </a:rPr>
               <a:t>اللُّغَاتُ</a:t>
@@ -19463,6 +19572,7 @@
                   <a:srgbClr val="1B3B6F"/>
                 </a:solidFill>
                 <a:latin typeface="Amiri" pitchFamily="2" charset="-78"/>
+                <a:ea typeface="Amiri" pitchFamily="2" charset="-78"/>
                 <a:cs typeface="Amiri" pitchFamily="2" charset="-78"/>
               </a:rPr>
               <a:t>المُسْتَوَى فِي العَرَبِيَّةِ</a:t>
@@ -19707,6 +19817,7 @@
                   <a:srgbClr val="1B3B6F"/>
                 </a:solidFill>
                 <a:latin typeface="Amiri" pitchFamily="2" charset="-78"/>
+                <a:ea typeface="Amiri" pitchFamily="2" charset="-78"/>
                 <a:cs typeface="Amiri" pitchFamily="2" charset="-78"/>
               </a:rPr>
               <a:t>الهِوَايَاتُ</a:t>
@@ -19951,6 +20062,7 @@
                   <a:srgbClr val="1B3B6F"/>
                 </a:solidFill>
                 <a:latin typeface="Amiri" pitchFamily="2" charset="-78"/>
+                <a:ea typeface="Amiri" pitchFamily="2" charset="-78"/>
                 <a:cs typeface="Amiri" pitchFamily="2" charset="-78"/>
               </a:rPr>
               <a:t>مُدَّةُ الدَّوْرَةِ المَطْلُوبَةُ</a:t>
@@ -20130,6 +20242,7 @@
                   <a:srgbClr val="1B3B6F"/>
                 </a:solidFill>
                 <a:latin typeface="Amiri" pitchFamily="2" charset="-78"/>
+                <a:ea typeface="Amiri" pitchFamily="2" charset="-78"/>
                 <a:cs typeface="Amiri" pitchFamily="2" charset="-78"/>
               </a:rPr>
               <a:t>جُمْلَةٌ: لِمَاذَا تُرِيدِينَ هٰذِهِ الدَّوْرَةَ؟</a:t>
@@ -20339,6 +20452,7 @@
                   <a:srgbClr val="D4AF37"/>
                 </a:solidFill>
                 <a:latin typeface="Amiri" pitchFamily="2" charset="-78"/>
+                <a:ea typeface="Amiri" pitchFamily="2" charset="-78"/>
                 <a:cs typeface="Amiri" pitchFamily="2" charset="-78"/>
               </a:rPr>
               <a:t>م</a:t>
@@ -20659,6 +20773,7 @@
                   <a:srgbClr val="8A6D1E"/>
                 </a:solidFill>
                 <a:latin typeface="Amiri" pitchFamily="2" charset="-78"/>
+                <a:ea typeface="Amiri" pitchFamily="2" charset="-78"/>
                 <a:cs typeface="Amiri" pitchFamily="2" charset="-78"/>
               </a:rPr>
               <a:t>نَمُوذَجُ الإِجَابَةِ</a:t>
@@ -20977,6 +21092,7 @@
                   <a:srgbClr val="1B3B6F"/>
                 </a:solidFill>
                 <a:latin typeface="Amiri" pitchFamily="2" charset="-78"/>
+                <a:ea typeface="Amiri" pitchFamily="2" charset="-78"/>
                 <a:cs typeface="Amiri" pitchFamily="2" charset="-78"/>
               </a:rPr>
               <a:t>خَدِيجَةُ عُمَرُ</a:t>
@@ -21015,6 +21131,7 @@
                   <a:srgbClr val="1B3B6F"/>
                 </a:solidFill>
                 <a:latin typeface="Amiri" pitchFamily="2" charset="-78"/>
+                <a:ea typeface="Amiri" pitchFamily="2" charset="-78"/>
                 <a:cs typeface="Amiri" pitchFamily="2" charset="-78"/>
               </a:rPr>
               <a:t>الاسْمُ</a:t>
@@ -21156,6 +21273,7 @@
                   <a:srgbClr val="1B3B6F"/>
                 </a:solidFill>
                 <a:latin typeface="Amiri" pitchFamily="2" charset="-78"/>
+                <a:ea typeface="Amiri" pitchFamily="2" charset="-78"/>
                 <a:cs typeface="Amiri" pitchFamily="2" charset="-78"/>
               </a:rPr>
               <a:t>سِتَّ عَشْرَةَ سَنَةً</a:t>
@@ -21194,6 +21312,7 @@
                   <a:srgbClr val="1B3B6F"/>
                 </a:solidFill>
                 <a:latin typeface="Amiri" pitchFamily="2" charset="-78"/>
+                <a:ea typeface="Amiri" pitchFamily="2" charset="-78"/>
                 <a:cs typeface="Amiri" pitchFamily="2" charset="-78"/>
               </a:rPr>
               <a:t>العُمُرُ</a:t>
@@ -21335,6 +21454,7 @@
                   <a:srgbClr val="1B3B6F"/>
                 </a:solidFill>
                 <a:latin typeface="Amiri" pitchFamily="2" charset="-78"/>
+                <a:ea typeface="Amiri" pitchFamily="2" charset="-78"/>
                 <a:cs typeface="Amiri" pitchFamily="2" charset="-78"/>
               </a:rPr>
               <a:t>بِرِيطَانِيَّةٌ</a:t>
@@ -21373,6 +21493,7 @@
                   <a:srgbClr val="1B3B6F"/>
                 </a:solidFill>
                 <a:latin typeface="Amiri" pitchFamily="2" charset="-78"/>
+                <a:ea typeface="Amiri" pitchFamily="2" charset="-78"/>
                 <a:cs typeface="Amiri" pitchFamily="2" charset="-78"/>
               </a:rPr>
               <a:t>الجِنْسِيَّةُ</a:t>
@@ -21514,6 +21635,7 @@
                   <a:srgbClr val="1B3B6F"/>
                 </a:solidFill>
                 <a:latin typeface="Amiri" pitchFamily="2" charset="-78"/>
+                <a:ea typeface="Amiri" pitchFamily="2" charset="-78"/>
                 <a:cs typeface="Amiri" pitchFamily="2" charset="-78"/>
               </a:rPr>
               <a:t>الإِنْجِلِيزِيَّةُ وَالعَرَبِيَّةُ وَالأُورْدِيَّةُ</a:t>
@@ -21552,6 +21674,7 @@
                   <a:srgbClr val="1B3B6F"/>
                 </a:solidFill>
                 <a:latin typeface="Amiri" pitchFamily="2" charset="-78"/>
+                <a:ea typeface="Amiri" pitchFamily="2" charset="-78"/>
                 <a:cs typeface="Amiri" pitchFamily="2" charset="-78"/>
               </a:rPr>
               <a:t>اللُّغَاتُ</a:t>
@@ -21693,6 +21816,7 @@
                   <a:srgbClr val="1B3B6F"/>
                 </a:solidFill>
                 <a:latin typeface="Amiri" pitchFamily="2" charset="-78"/>
+                <a:ea typeface="Amiri" pitchFamily="2" charset="-78"/>
                 <a:cs typeface="Amiri" pitchFamily="2" charset="-78"/>
               </a:rPr>
               <a:t>مُتَوَسِّطٌ</a:t>
@@ -21731,6 +21855,7 @@
                   <a:srgbClr val="1B3B6F"/>
                 </a:solidFill>
                 <a:latin typeface="Amiri" pitchFamily="2" charset="-78"/>
+                <a:ea typeface="Amiri" pitchFamily="2" charset="-78"/>
                 <a:cs typeface="Amiri" pitchFamily="2" charset="-78"/>
               </a:rPr>
               <a:t>المُسْتَوَى فِي العَرَبِيَّةِ</a:t>
@@ -21872,6 +21997,7 @@
                   <a:srgbClr val="1B3B6F"/>
                 </a:solidFill>
                 <a:latin typeface="Amiri" pitchFamily="2" charset="-78"/>
+                <a:ea typeface="Amiri" pitchFamily="2" charset="-78"/>
                 <a:cs typeface="Amiri" pitchFamily="2" charset="-78"/>
               </a:rPr>
               <a:t>القِرَاءَةُ وَالسِّبَاحَةُ</a:t>
@@ -21910,6 +22036,7 @@
                   <a:srgbClr val="1B3B6F"/>
                 </a:solidFill>
                 <a:latin typeface="Amiri" pitchFamily="2" charset="-78"/>
+                <a:ea typeface="Amiri" pitchFamily="2" charset="-78"/>
                 <a:cs typeface="Amiri" pitchFamily="2" charset="-78"/>
               </a:rPr>
               <a:t>الهِوَايَاتُ</a:t>
@@ -22051,6 +22178,7 @@
                   <a:srgbClr val="1B3B6F"/>
                 </a:solidFill>
                 <a:latin typeface="Amiri" pitchFamily="2" charset="-78"/>
+                <a:ea typeface="Amiri" pitchFamily="2" charset="-78"/>
                 <a:cs typeface="Amiri" pitchFamily="2" charset="-78"/>
               </a:rPr>
               <a:t>أُسْبُوعَانِ فِي يُولْيُو</a:t>
@@ -22089,6 +22217,7 @@
                   <a:srgbClr val="1B3B6F"/>
                 </a:solidFill>
                 <a:latin typeface="Amiri" pitchFamily="2" charset="-78"/>
+                <a:ea typeface="Amiri" pitchFamily="2" charset="-78"/>
                 <a:cs typeface="Amiri" pitchFamily="2" charset="-78"/>
               </a:rPr>
               <a:t>مُدَّةُ الدَّوْرَةِ المَطْلُوبَةُ</a:t>
@@ -22230,6 +22359,7 @@
                   <a:srgbClr val="1B3B6F"/>
                 </a:solidFill>
                 <a:latin typeface="Amiri" pitchFamily="2" charset="-78"/>
+                <a:ea typeface="Amiri" pitchFamily="2" charset="-78"/>
                 <a:cs typeface="Amiri" pitchFamily="2" charset="-78"/>
               </a:rPr>
               <a:t>أُرِيدُ أَنْ أُحَسِّنَ مُحَادَثَتِي، لِأَنِّي سَأَدْرُسُ العَرَبِيَّةَ فِي الجَامِعَةِ.</a:t>
@@ -22268,6 +22398,7 @@
                   <a:srgbClr val="1B3B6F"/>
                 </a:solidFill>
                 <a:latin typeface="Amiri" pitchFamily="2" charset="-78"/>
+                <a:ea typeface="Amiri" pitchFamily="2" charset="-78"/>
                 <a:cs typeface="Amiri" pitchFamily="2" charset="-78"/>
               </a:rPr>
               <a:t>جُمْلَةٌ: لِمَاذَا تُرِيدِينَ هٰذِهِ الدَّوْرَةَ؟</a:t>
@@ -22477,6 +22608,7 @@
                   <a:srgbClr val="D4AF37"/>
                 </a:solidFill>
                 <a:latin typeface="Amiri" pitchFamily="2" charset="-78"/>
+                <a:ea typeface="Amiri" pitchFamily="2" charset="-78"/>
                 <a:cs typeface="Amiri" pitchFamily="2" charset="-78"/>
               </a:rPr>
               <a:t>م</a:t>
@@ -22797,6 +22929,7 @@
                   <a:srgbClr val="8A6D1E"/>
                 </a:solidFill>
                 <a:latin typeface="Amiri" pitchFamily="2" charset="-78"/>
+                <a:ea typeface="Amiri" pitchFamily="2" charset="-78"/>
                 <a:cs typeface="Amiri" pitchFamily="2" charset="-78"/>
               </a:rPr>
               <a:t>الاحْتِفَالُ بِالعِيدِ</a:t>
@@ -23272,6 +23405,7 @@
                   <a:srgbClr val="1B3B6F"/>
                 </a:solidFill>
                 <a:latin typeface="Amiri" pitchFamily="2" charset="-78"/>
+                <a:ea typeface="Amiri" pitchFamily="2" charset="-78"/>
                 <a:cs typeface="Amiri" pitchFamily="2" charset="-78"/>
               </a:rPr>
               <a:t>احْتَفَلْنَا بِالعِيدِ فِي …</a:t>
@@ -23348,6 +23482,7 @@
                   <a:srgbClr val="1B3B6F"/>
                 </a:solidFill>
                 <a:latin typeface="Amiri" pitchFamily="2" charset="-78"/>
+                <a:ea typeface="Amiri" pitchFamily="2" charset="-78"/>
                 <a:cs typeface="Amiri" pitchFamily="2" charset="-78"/>
               </a:rPr>
               <a:t>لَبِسْتُ … وَأَكَلْنَا …</a:t>
@@ -23424,6 +23559,7 @@
                   <a:srgbClr val="1B3B6F"/>
                 </a:solidFill>
                 <a:latin typeface="Amiri" pitchFamily="2" charset="-78"/>
+                <a:ea typeface="Amiri" pitchFamily="2" charset="-78"/>
                 <a:cs typeface="Amiri" pitchFamily="2" charset="-78"/>
               </a:rPr>
               <a:t>أُحِبُّ العِيدَ لِأَنَّ …</a:t>
@@ -23500,6 +23636,7 @@
                   <a:srgbClr val="1B3B6F"/>
                 </a:solidFill>
                 <a:latin typeface="Amiri" pitchFamily="2" charset="-78"/>
+                <a:ea typeface="Amiri" pitchFamily="2" charset="-78"/>
                 <a:cs typeface="Amiri" pitchFamily="2" charset="-78"/>
               </a:rPr>
               <a:t>فِي العِيدِ القَادِمِ سَأُسَاعِدُ …</a:t>
@@ -23671,6 +23808,7 @@
                   <a:srgbClr val="D4AF37"/>
                 </a:solidFill>
                 <a:latin typeface="Amiri" pitchFamily="2" charset="-78"/>
+                <a:ea typeface="Amiri" pitchFamily="2" charset="-78"/>
                 <a:cs typeface="Amiri" pitchFamily="2" charset="-78"/>
               </a:rPr>
               <a:t>م</a:t>
@@ -23991,6 +24129,7 @@
                   <a:srgbClr val="8A6D1E"/>
                 </a:solidFill>
                 <a:latin typeface="Amiri" pitchFamily="2" charset="-78"/>
+                <a:ea typeface="Amiri" pitchFamily="2" charset="-78"/>
                 <a:cs typeface="Amiri" pitchFamily="2" charset="-78"/>
               </a:rPr>
               <a:t>نَصُّ السُّؤَالِ</a:t>
@@ -24271,6 +24410,7 @@
                   <a:srgbClr val="1B3B6F"/>
                 </a:solidFill>
                 <a:latin typeface="Amiri" pitchFamily="2" charset="-78"/>
+                <a:ea typeface="Amiri" pitchFamily="2" charset="-78"/>
                 <a:cs typeface="Amiri" pitchFamily="2" charset="-78"/>
               </a:rPr>
               <a:t>اكْتُبِي رِسَالَةً إِلَى صَدِيقَتِكِ عَنِ الاحْتِفَالِ بِالعِيدِ (٨٠–٩٠ كَلِمَةً).</a:t>
@@ -24412,6 +24552,7 @@
                   <a:srgbClr val="1B3B6F"/>
                 </a:solidFill>
                 <a:latin typeface="Amiri" pitchFamily="2" charset="-78"/>
+                <a:ea typeface="Amiri" pitchFamily="2" charset="-78"/>
                 <a:cs typeface="Amiri" pitchFamily="2" charset="-78"/>
               </a:rPr>
               <a:t>أَيْنَ احْتَفَلْتِ بِالعِيدِ؟ وَمَعَ مَنْ؟</a:t>
@@ -24553,6 +24694,7 @@
                   <a:srgbClr val="1B3B6F"/>
                 </a:solidFill>
                 <a:latin typeface="Amiri" pitchFamily="2" charset="-78"/>
+                <a:ea typeface="Amiri" pitchFamily="2" charset="-78"/>
                 <a:cs typeface="Amiri" pitchFamily="2" charset="-78"/>
               </a:rPr>
               <a:t>مَاذَا لَبِسْتِ؟ وَمَاذَا أَكَلْتُمْ؟</a:t>
@@ -24694,6 +24836,7 @@
                   <a:srgbClr val="1B3B6F"/>
                 </a:solidFill>
                 <a:latin typeface="Amiri" pitchFamily="2" charset="-78"/>
+                <a:ea typeface="Amiri" pitchFamily="2" charset="-78"/>
                 <a:cs typeface="Amiri" pitchFamily="2" charset="-78"/>
               </a:rPr>
               <a:t>لِمَاذَا تُحِبِّينَ العِيدَ؟</a:t>
@@ -24835,6 +24978,7 @@
                   <a:srgbClr val="1B3B6F"/>
                 </a:solidFill>
                 <a:latin typeface="Amiri" pitchFamily="2" charset="-78"/>
+                <a:ea typeface="Amiri" pitchFamily="2" charset="-78"/>
                 <a:cs typeface="Amiri" pitchFamily="2" charset="-78"/>
               </a:rPr>
               <a:t>مَا خِطَطُكِ لِلْعِيدِ القَادِمِ؟ وَاسْأَلِي صَدِيقَتَكِ سُؤَالًا.</a:t>
@@ -25044,6 +25188,7 @@
                   <a:srgbClr val="D4AF37"/>
                 </a:solidFill>
                 <a:latin typeface="Amiri" pitchFamily="2" charset="-78"/>
+                <a:ea typeface="Amiri" pitchFamily="2" charset="-78"/>
                 <a:cs typeface="Amiri" pitchFamily="2" charset="-78"/>
               </a:rPr>
               <a:t>م</a:t>
@@ -25364,6 +25509,7 @@
                   <a:srgbClr val="8A6D1E"/>
                 </a:solidFill>
                 <a:latin typeface="Amiri" pitchFamily="2" charset="-78"/>
+                <a:ea typeface="Amiri" pitchFamily="2" charset="-78"/>
                 <a:cs typeface="Amiri" pitchFamily="2" charset="-78"/>
               </a:rPr>
               <a:t>قَوَالِبُ الكِتَابَةِ</a:t>
@@ -25644,6 +25790,7 @@
                   <a:srgbClr val="1B3B6F"/>
                 </a:solidFill>
                 <a:latin typeface="Amiri" pitchFamily="2" charset="-78"/>
+                <a:ea typeface="Amiri" pitchFamily="2" charset="-78"/>
                 <a:cs typeface="Amiri" pitchFamily="2" charset="-78"/>
               </a:rPr>
               <a:t>عَزِيزَتِي ______ ، كَيْفَ حَالُكِ؟</a:t>
@@ -25850,6 +25997,7 @@
                   <a:srgbClr val="1B3B6F"/>
                 </a:solidFill>
                 <a:latin typeface="Amiri" pitchFamily="2" charset="-78"/>
+                <a:ea typeface="Amiri" pitchFamily="2" charset="-78"/>
                 <a:cs typeface="Amiri" pitchFamily="2" charset="-78"/>
               </a:rPr>
               <a:t>احْتَفَلْنَا بِالعِيدِ فِي ______ مَعَ ______ .</a:t>
@@ -26056,6 +26204,7 @@
                   <a:srgbClr val="1B3B6F"/>
                 </a:solidFill>
                 <a:latin typeface="Amiri" pitchFamily="2" charset="-78"/>
+                <a:ea typeface="Amiri" pitchFamily="2" charset="-78"/>
                 <a:cs typeface="Amiri" pitchFamily="2" charset="-78"/>
               </a:rPr>
               <a:t>لَبِسْتُ ______ ، وَأَكَلْنَا ______ .</a:t>
@@ -26262,6 +26411,7 @@
                   <a:srgbClr val="1B3B6F"/>
                 </a:solidFill>
                 <a:latin typeface="Amiri" pitchFamily="2" charset="-78"/>
+                <a:ea typeface="Amiri" pitchFamily="2" charset="-78"/>
                 <a:cs typeface="Amiri" pitchFamily="2" charset="-78"/>
               </a:rPr>
               <a:t>أُحِبُّ العِيدَ كَثِيرًا، لِأَنَّ ______ .</a:t>
@@ -26468,6 +26618,7 @@
                   <a:srgbClr val="1B3B6F"/>
                 </a:solidFill>
                 <a:latin typeface="Amiri" pitchFamily="2" charset="-78"/>
+                <a:ea typeface="Amiri" pitchFamily="2" charset="-78"/>
                 <a:cs typeface="Amiri" pitchFamily="2" charset="-78"/>
               </a:rPr>
               <a:t>فِي العِيدِ القَادِمِ سَأُسَاعِدُ ______ .</a:t>
@@ -26674,6 +26825,7 @@
                   <a:srgbClr val="1B3B6F"/>
                 </a:solidFill>
                 <a:latin typeface="Amiri" pitchFamily="2" charset="-78"/>
+                <a:ea typeface="Amiri" pitchFamily="2" charset="-78"/>
                 <a:cs typeface="Amiri" pitchFamily="2" charset="-78"/>
               </a:rPr>
               <a:t>وَأَنْتِ، كَيْفَ ______ ؟ مَعَ مَحَبَّتِي.</a:t>
@@ -26913,13 +27065,9 @@
     <a:fontScheme name="Office">
       <a:majorFont>
         <a:latin typeface="Calibri Light" panose="020F0302020204030204"/>
-        <a:ea typeface=""/>
-        <a:cs typeface=""/>
-        <a:font script="Jpan" typeface="游ゴシック Light"/>
-        <a:font script="Hang" typeface="맑은 고딕"/>
-        <a:font script="Hans" typeface="等线 Light"/>
-        <a:font script="Hant" typeface="新細明體"/>
-        <a:font script="Arab" typeface="Times New Roman"/>
+        <a:ea typeface="Amiri" pitchFamily="2" charset="-78"/>
+        <a:cs typeface="Amiri" pitchFamily="2" charset="-78"/>
+        <a:font script="Arab" typeface="Amiri"/>
         <a:font script="Hebr" typeface="Times New Roman"/>
         <a:font script="Thai" typeface="Angsana New"/>
         <a:font script="Ethi" typeface="Nyala"/>
@@ -26965,13 +27113,9 @@
       </a:majorFont>
       <a:minorFont>
         <a:latin typeface="Calibri" panose="020F0502020204030204"/>
-        <a:ea typeface=""/>
-        <a:cs typeface=""/>
-        <a:font script="Jpan" typeface="游ゴシック"/>
-        <a:font script="Hang" typeface="맑은 고딕"/>
-        <a:font script="Hans" typeface="等线"/>
-        <a:font script="Hant" typeface="新細明體"/>
-        <a:font script="Arab" typeface="Arial"/>
+        <a:ea typeface="Amiri" pitchFamily="2" charset="-78"/>
+        <a:cs typeface="Amiri" pitchFamily="2" charset="-78"/>
+        <a:font script="Arab" typeface="Amiri"/>
         <a:font script="Hebr" typeface="Arial"/>
         <a:font script="Thai" typeface="Cordia New"/>
         <a:font script="Ethi" typeface="Nyala"/>

--- a/Final_Revision/Exam_Practice/FR-L06_Writing_Workshop_Final_Mock_Exam.pptx
+++ b/Final_Revision/Exam_Practice/FR-L06_Writing_Workshop_Final_Mock_Exam.pptx
@@ -3848,7 +3848,7 @@
                 <a:solidFill>
                   <a:srgbClr val="FFFFFF"/>
                 </a:solidFill>
-                <a:latin typeface="Calibri" pitchFamily="34" charset="0"/>
+                <a:latin typeface="Amiri" pitchFamily="2" charset="-78"/>
                 <a:ea typeface="Amiri" pitchFamily="2" charset="-78"/>
                 <a:cs typeface="Amiri" pitchFamily="2" charset="-78"/>
               </a:rPr>
@@ -3914,7 +3914,7 @@
                 <a:solidFill>
                   <a:srgbClr val="FFFFFF"/>
                 </a:solidFill>
-                <a:latin typeface="Calibri" pitchFamily="34" charset="0"/>
+                <a:latin typeface="Amiri" pitchFamily="2" charset="-78"/>
                 <a:ea typeface="Amiri" pitchFamily="2" charset="-78"/>
                 <a:cs typeface="Amiri" pitchFamily="2" charset="-78"/>
               </a:rPr>
@@ -3980,7 +3980,7 @@
                 <a:solidFill>
                   <a:srgbClr val="FFFFFF"/>
                 </a:solidFill>
-                <a:latin typeface="Calibri" pitchFamily="34" charset="0"/>
+                <a:latin typeface="Amiri" pitchFamily="2" charset="-78"/>
                 <a:ea typeface="Amiri" pitchFamily="2" charset="-78"/>
                 <a:cs typeface="Amiri" pitchFamily="2" charset="-78"/>
               </a:rPr>
@@ -4046,7 +4046,7 @@
                 <a:solidFill>
                   <a:srgbClr val="FFFFFF"/>
                 </a:solidFill>
-                <a:latin typeface="Calibri" pitchFamily="34" charset="0"/>
+                <a:latin typeface="Amiri" pitchFamily="2" charset="-78"/>
                 <a:ea typeface="Amiri" pitchFamily="2" charset="-78"/>
                 <a:cs typeface="Amiri" pitchFamily="2" charset="-78"/>
               </a:rPr>
@@ -4844,7 +4844,7 @@
                 <a:solidFill>
                   <a:srgbClr val="FFFFFF"/>
                 </a:solidFill>
-                <a:latin typeface="Calibri" pitchFamily="34" charset="0"/>
+                <a:latin typeface="Amiri" pitchFamily="2" charset="-78"/>
                 <a:ea typeface="Amiri" pitchFamily="2" charset="-78"/>
                 <a:cs typeface="Amiri" pitchFamily="2" charset="-78"/>
               </a:rPr>
@@ -4910,7 +4910,7 @@
                 <a:solidFill>
                   <a:srgbClr val="FFFFFF"/>
                 </a:solidFill>
-                <a:latin typeface="Calibri" pitchFamily="34" charset="0"/>
+                <a:latin typeface="Amiri" pitchFamily="2" charset="-78"/>
                 <a:ea typeface="Amiri" pitchFamily="2" charset="-78"/>
                 <a:cs typeface="Amiri" pitchFamily="2" charset="-78"/>
               </a:rPr>
@@ -4976,7 +4976,7 @@
                 <a:solidFill>
                   <a:srgbClr val="FFFFFF"/>
                 </a:solidFill>
-                <a:latin typeface="Calibri" pitchFamily="34" charset="0"/>
+                <a:latin typeface="Amiri" pitchFamily="2" charset="-78"/>
                 <a:ea typeface="Amiri" pitchFamily="2" charset="-78"/>
                 <a:cs typeface="Amiri" pitchFamily="2" charset="-78"/>
               </a:rPr>
@@ -5042,7 +5042,7 @@
                 <a:solidFill>
                   <a:srgbClr val="FFFFFF"/>
                 </a:solidFill>
-                <a:latin typeface="Calibri" pitchFamily="34" charset="0"/>
+                <a:latin typeface="Amiri" pitchFamily="2" charset="-78"/>
                 <a:ea typeface="Amiri" pitchFamily="2" charset="-78"/>
                 <a:cs typeface="Amiri" pitchFamily="2" charset="-78"/>
               </a:rPr>
@@ -8599,7 +8599,7 @@
                 <a:solidFill>
                   <a:srgbClr val="FFFFFF"/>
                 </a:solidFill>
-                <a:latin typeface="Calibri" pitchFamily="34" charset="0"/>
+                <a:latin typeface="Amiri" pitchFamily="2" charset="-78"/>
                 <a:ea typeface="Amiri" pitchFamily="2" charset="-78"/>
                 <a:cs typeface="Amiri" pitchFamily="2" charset="-78"/>
               </a:rPr>
@@ -8665,7 +8665,7 @@
                 <a:solidFill>
                   <a:srgbClr val="FFFFFF"/>
                 </a:solidFill>
-                <a:latin typeface="Calibri" pitchFamily="34" charset="0"/>
+                <a:latin typeface="Amiri" pitchFamily="2" charset="-78"/>
                 <a:ea typeface="Amiri" pitchFamily="2" charset="-78"/>
                 <a:cs typeface="Amiri" pitchFamily="2" charset="-78"/>
               </a:rPr>
@@ -8731,7 +8731,7 @@
                 <a:solidFill>
                   <a:srgbClr val="FFFFFF"/>
                 </a:solidFill>
-                <a:latin typeface="Calibri" pitchFamily="34" charset="0"/>
+                <a:latin typeface="Amiri" pitchFamily="2" charset="-78"/>
                 <a:ea typeface="Amiri" pitchFamily="2" charset="-78"/>
                 <a:cs typeface="Amiri" pitchFamily="2" charset="-78"/>
               </a:rPr>
@@ -8797,7 +8797,7 @@
                 <a:solidFill>
                   <a:srgbClr val="FFFFFF"/>
                 </a:solidFill>
-                <a:latin typeface="Calibri" pitchFamily="34" charset="0"/>
+                <a:latin typeface="Amiri" pitchFamily="2" charset="-78"/>
                 <a:ea typeface="Amiri" pitchFamily="2" charset="-78"/>
                 <a:cs typeface="Amiri" pitchFamily="2" charset="-78"/>
               </a:rPr>
@@ -9584,7 +9584,7 @@
                 <a:solidFill>
                   <a:srgbClr val="FFFFFF"/>
                 </a:solidFill>
-                <a:latin typeface="Calibri" pitchFamily="34" charset="0"/>
+                <a:latin typeface="Amiri" pitchFamily="2" charset="-78"/>
                 <a:ea typeface="Amiri" pitchFamily="2" charset="-78"/>
                 <a:cs typeface="Amiri" pitchFamily="2" charset="-78"/>
               </a:rPr>
@@ -9650,7 +9650,7 @@
                 <a:solidFill>
                   <a:srgbClr val="FFFFFF"/>
                 </a:solidFill>
-                <a:latin typeface="Calibri" pitchFamily="34" charset="0"/>
+                <a:latin typeface="Amiri" pitchFamily="2" charset="-78"/>
                 <a:ea typeface="Amiri" pitchFamily="2" charset="-78"/>
                 <a:cs typeface="Amiri" pitchFamily="2" charset="-78"/>
               </a:rPr>
@@ -9716,7 +9716,7 @@
                 <a:solidFill>
                   <a:srgbClr val="FFFFFF"/>
                 </a:solidFill>
-                <a:latin typeface="Calibri" pitchFamily="34" charset="0"/>
+                <a:latin typeface="Amiri" pitchFamily="2" charset="-78"/>
                 <a:ea typeface="Amiri" pitchFamily="2" charset="-78"/>
                 <a:cs typeface="Amiri" pitchFamily="2" charset="-78"/>
               </a:rPr>
@@ -9782,7 +9782,7 @@
                 <a:solidFill>
                   <a:srgbClr val="FFFFFF"/>
                 </a:solidFill>
-                <a:latin typeface="Calibri" pitchFamily="34" charset="0"/>
+                <a:latin typeface="Amiri" pitchFamily="2" charset="-78"/>
                 <a:ea typeface="Amiri" pitchFamily="2" charset="-78"/>
                 <a:cs typeface="Amiri" pitchFamily="2" charset="-78"/>
               </a:rPr>
@@ -10569,7 +10569,7 @@
                 <a:solidFill>
                   <a:srgbClr val="FFFFFF"/>
                 </a:solidFill>
-                <a:latin typeface="Calibri" pitchFamily="34" charset="0"/>
+                <a:latin typeface="Amiri" pitchFamily="2" charset="-78"/>
                 <a:ea typeface="Amiri" pitchFamily="2" charset="-78"/>
                 <a:cs typeface="Amiri" pitchFamily="2" charset="-78"/>
               </a:rPr>
@@ -10635,7 +10635,7 @@
                 <a:solidFill>
                   <a:srgbClr val="FFFFFF"/>
                 </a:solidFill>
-                <a:latin typeface="Calibri" pitchFamily="34" charset="0"/>
+                <a:latin typeface="Amiri" pitchFamily="2" charset="-78"/>
                 <a:ea typeface="Amiri" pitchFamily="2" charset="-78"/>
                 <a:cs typeface="Amiri" pitchFamily="2" charset="-78"/>
               </a:rPr>
@@ -10701,7 +10701,7 @@
                 <a:solidFill>
                   <a:srgbClr val="FFFFFF"/>
                 </a:solidFill>
-                <a:latin typeface="Calibri" pitchFamily="34" charset="0"/>
+                <a:latin typeface="Amiri" pitchFamily="2" charset="-78"/>
                 <a:ea typeface="Amiri" pitchFamily="2" charset="-78"/>
                 <a:cs typeface="Amiri" pitchFamily="2" charset="-78"/>
               </a:rPr>
@@ -10767,7 +10767,7 @@
                 <a:solidFill>
                   <a:srgbClr val="FFFFFF"/>
                 </a:solidFill>
-                <a:latin typeface="Calibri" pitchFamily="34" charset="0"/>
+                <a:latin typeface="Amiri" pitchFamily="2" charset="-78"/>
                 <a:ea typeface="Amiri" pitchFamily="2" charset="-78"/>
                 <a:cs typeface="Amiri" pitchFamily="2" charset="-78"/>
               </a:rPr>
